--- a/media/resources/files/Ekvivalenettuuluk_Onduktardan_menen_Bolchoktor-1234_jDVbXcf.pptx
+++ b/media/resources/files/Ekvivalenettuuluk_Onduktardan_menen_Bolchoktor-1234_jDVbXcf.pptx
@@ -5776,7 +5776,7 @@
                 <a:ea typeface="+mn-ea"/>
                 <a:cs typeface="+mn-cs"/>
               </a:rPr>
-              <a:t>Турдуу пикирлер учун ыраазычылык билдиребиз.</a:t>
+              <a:t>Түрдүү пикирлер үчүн ыраазычылык билдиребиз.</a:t>
             </a:r>
           </a:p>
           <a:p>

--- a/media/resources/files/Ekvivalenettuuluk_Onduktardan_menen_Bolchoktor-1234_jDVbXcf.pptx
+++ b/media/resources/files/Ekvivalenettuuluk_Onduktardan_menen_Bolchoktor-1234_jDVbXcf.pptx
@@ -2142,7 +2142,7 @@
           <a:p>
             <a:r>
               <a:rPr lang="en-GB" dirty="0"/>
-              <a:t>0.28  = </a:t>
+              <a:t>0,28  = </a:t>
             </a:r>
           </a:p>
         </p:txBody>
@@ -2177,7 +2177,7 @@
           <a:p>
             <a:r>
               <a:rPr lang="en-GB" dirty="0"/>
-              <a:t>0.45  = </a:t>
+              <a:t>0,45  = </a:t>
             </a:r>
           </a:p>
         </p:txBody>
@@ -2212,7 +2212,7 @@
           <a:p>
             <a:r>
               <a:rPr lang="en-GB" dirty="0"/>
-              <a:t>0.029  = </a:t>
+              <a:t>0,029  = </a:t>
             </a:r>
           </a:p>
         </p:txBody>
@@ -2289,7 +2289,7 @@
           <a:p>
             <a:r>
               <a:rPr lang="en-GB" dirty="0"/>
-              <a:t>1.35 = </a:t>
+              <a:t>1,35 = </a:t>
             </a:r>
           </a:p>
         </p:txBody>
@@ -2324,7 +2324,7 @@
           <a:p>
             <a:r>
               <a:rPr lang="en-GB" dirty="0"/>
-              <a:t>0.468  = </a:t>
+              <a:t>0,468  = </a:t>
             </a:r>
           </a:p>
         </p:txBody>
@@ -2359,7 +2359,7 @@
           <a:p>
             <a:r>
               <a:rPr lang="en-GB" dirty="0"/>
-              <a:t>0.375  = </a:t>
+              <a:t>0,375  = </a:t>
             </a:r>
           </a:p>
         </p:txBody>
@@ -4629,7 +4629,7 @@
           <a:p>
             <a:r>
               <a:rPr lang="en-GB" dirty="0"/>
-              <a:t>0.28  = </a:t>
+              <a:t>0,28  = </a:t>
             </a:r>
           </a:p>
         </p:txBody>
@@ -4664,7 +4664,7 @@
           <a:p>
             <a:r>
               <a:rPr lang="en-GB" dirty="0"/>
-              <a:t>0.45  = </a:t>
+              <a:t>0,45  = </a:t>
             </a:r>
           </a:p>
         </p:txBody>
@@ -4699,7 +4699,7 @@
           <a:p>
             <a:r>
               <a:rPr lang="en-GB" dirty="0"/>
-              <a:t>0.029  = </a:t>
+              <a:t>0,029  = </a:t>
             </a:r>
           </a:p>
         </p:txBody>
@@ -4776,7 +4776,7 @@
           <a:p>
             <a:r>
               <a:rPr lang="en-GB" dirty="0"/>
-              <a:t>1.35 = </a:t>
+              <a:t>1,35 = </a:t>
             </a:r>
           </a:p>
         </p:txBody>
@@ -4811,7 +4811,7 @@
           <a:p>
             <a:r>
               <a:rPr lang="en-GB" dirty="0"/>
-              <a:t>0.468  = </a:t>
+              <a:t>0,468  = </a:t>
             </a:r>
           </a:p>
         </p:txBody>
@@ -4846,7 +4846,7 @@
           <a:p>
             <a:r>
               <a:rPr lang="en-GB" dirty="0"/>
-              <a:t>0.375  = </a:t>
+              <a:t>0,375  = </a:t>
             </a:r>
           </a:p>
         </p:txBody>
